--- a/output/archive/WestravelleData/Stability/XA5/WA-2022-226/Readouts/Client/XA5_StabilityReview_QA-APPROVED.pptx
+++ b/output/archive/WestravelleData/Stability/XA5/WA-2022-226/Readouts/Client/XA5_StabilityReview_QA-APPROVED.pptx
@@ -4922,7 +4922,7 @@
                         <a:rPr sz="1000">
                           <a:latin typeface="Arial"/>
                         </a:rPr>
-                        <a:t>99.2</a:t>
+                        <a:t>100.1</a:t>
                       </a:r>
                     </a:p>
                   </a:txBody>
@@ -5461,22 +5461,22 @@
                         <a:rPr sz="1000">
                           <a:latin typeface="Arial"/>
                         </a:rPr>
-                        <a:t>99.4</a:t>
-                      </a:r>
-                    </a:p>
-                  </a:txBody>
-                  <a:tcPr/>
-                </a:tc>
-                <a:tc>
-                  <a:txBody>
-                    <a:bodyPr/>
-                    <a:lstStyle/>
-                    <a:p>
-                      <a:r>
-                        <a:rPr sz="1000">
-                          <a:latin typeface="Arial"/>
-                        </a:rPr>
-                        <a:t>0.20</a:t>
+                        <a:t>100.1</a:t>
+                      </a:r>
+                    </a:p>
+                  </a:txBody>
+                  <a:tcPr/>
+                </a:tc>
+                <a:tc>
+                  <a:txBody>
+                    <a:bodyPr/>
+                    <a:lstStyle/>
+                    <a:p>
+                      <a:r>
+                        <a:rPr sz="1000">
+                          <a:latin typeface="Arial"/>
+                        </a:rPr>
+                        <a:t>0.16</a:t>
                       </a:r>
                     </a:p>
                   </a:txBody>
